--- a/data/Марафон_добрых_дел_для_участников.pptx
+++ b/data/Марафон_добрых_дел_для_участников.pptx
@@ -6495,6 +6495,25 @@
                 <a:latin typeface="Segoe UI"/>
               </a:rPr>
               <a:t>«Рейтинг» — таблица команд.</a:t>
+            </a:r>
+          </a:p>
+          <a:p>
+            <a:pPr algn="l">
+              <a:lnSpc>
+                <a:spcPct val="115000"/>
+              </a:lnSpc>
+              <a:spcBef>
+                <a:spcPts val="1600"/>
+              </a:spcBef>
+            </a:pPr>
+            <a:r>
+              <a:rPr sz="1700" b="0">
+                <a:solidFill>
+                  <a:srgbClr val="FFFFFF"/>
+                </a:solidFill>
+                <a:latin typeface="Segoe UI"/>
+              </a:rPr>
+              <a:t>«Галерея» — работы коллег: фото листаются прямо в сообщении.</a:t>
             </a:r>
           </a:p>
           <a:p>

--- a/data/Марафон_добрых_дел_для_участников.pptx
+++ b/data/Марафон_добрых_дел_для_участников.pptx
@@ -6494,7 +6494,7 @@
                 </a:solidFill>
                 <a:latin typeface="Segoe UI"/>
               </a:rPr>
-              <a:t>«Рейтинг» — таблица команд.</a:t>
+              <a:t>«Рейтинг» — ТОП-10 команд и ТОП-10 участников, видно своё место.</a:t>
             </a:r>
           </a:p>
           <a:p>
